--- a/documents/presentation_accessible.pptx
+++ b/documents/presentation_accessible.pptx
@@ -4143,14 +4143,14 @@
               <a:rPr lang="en-US" sz="7200" dirty="0">
                 <a:latin typeface="+mj-lt"/>
               </a:rPr>
-              <a:t>Introduction to Physics</a:t>
+              <a:t>Wprowadzenie do fizyki</a:t>
             </a:r>
           </a:p>
         </p:txBody>
       </p:sp>
       <p:pic>
         <p:nvPicPr>
-          <p:cNvPr id="4" name="image1.png" descr="Accessible University logo">
+          <p:cNvPr id="4" name="image1.png" descr="Logo Dostępnego Uniwersytetu">
             <a:extLst>
               <a:ext uri="{FF2B5EF4-FFF2-40B4-BE49-F238E27FC236}">
                 <a16:creationId xmlns:a16="http://schemas.microsoft.com/office/drawing/2014/main" id="{4003DE12-1F3B-7E4D-83DE-EDBF8273177C}"/>
@@ -4240,7 +4240,7 @@
               <a:rPr lang="en-US" sz="6000" dirty="0">
                 <a:latin typeface="+mj-lt"/>
               </a:rPr>
-              <a:t>Textbook</a:t>
+              <a:t>Podręcznik</a:t>
             </a:r>
           </a:p>
         </p:txBody>
@@ -4275,20 +4275,20 @@
               <a:rPr lang="en-US" dirty="0">
                 <a:latin typeface="+mn-lt"/>
               </a:rPr>
-              <a:t>Text </a:t>
+              <a:t>Tekst Wprowadzenie do fizyki, wydanie drugie, autorstwa prowadzącego</a:t>
             </a:r>
             <a:r>
               <a:rPr lang="en-US" dirty="0">
                 <a:latin typeface="+mn-lt"/>
                 <a:hlinkClick r:id="rId3"/>
               </a:rPr>
-              <a:t>Introduction to Physics, Second Edition</a:t>
+              <a:t/>
             </a:r>
             <a:r>
               <a:rPr lang="en-US" dirty="0">
                 <a:latin typeface="+mn-lt"/>
               </a:rPr>
-              <a:t>, authored by the instructor</a:t>
+              <a:t/>
             </a:r>
           </a:p>
           <a:p>
@@ -4304,7 +4304,7 @@
       </p:sp>
       <p:grpSp>
         <p:nvGrpSpPr>
-          <p:cNvPr id="10" name="Group 9" descr="A group of ice cubes representing solid. Water with bubbles representing liquid. A cloud in the sky representing gas. These elements make up the three phases of matter. ">
+          <p:cNvPr id="10" name="Group 9" descr="Grupa kostek lodu przedstawiających ciało stałe. Woda z bąbelkami przedstawiająca ciecz. Chmura na niebie przedstawiająca gaz. Elementy te tworzą trzy stany skupienia materii. ">
             <a:extLst>
               <a:ext uri="{FF2B5EF4-FFF2-40B4-BE49-F238E27FC236}">
                 <a16:creationId xmlns:a16="http://schemas.microsoft.com/office/drawing/2014/main" id="{45C6DB85-8116-EC23-D004-A45FD3B82916}"/>
@@ -4479,7 +4479,7 @@
               <a:rPr lang="en-US" sz="6000" dirty="0">
                 <a:latin typeface="+mj-lt"/>
               </a:rPr>
-              <a:t>Course Objectives</a:t>
+              <a:t>Cele kursu</a:t>
             </a:r>
           </a:p>
         </p:txBody>
@@ -4514,7 +4514,7 @@
               <a:rPr lang="en-US" dirty="0">
                 <a:latin typeface="+mn-lt"/>
               </a:rPr>
-              <a:t>To offer students exposure to basic principles of Physics</a:t>
+              <a:t>Zapoznanie studentów z podstawowymi zasadami fizyki</a:t>
             </a:r>
           </a:p>
           <a:p>
@@ -4527,7 +4527,7 @@
               <a:rPr lang="en-US" dirty="0">
                 <a:latin typeface="+mn-lt"/>
               </a:rPr>
-              <a:t>To provide students with rich, thought-provoking discussions during lecture sessions</a:t>
+              <a:t>Zapewnienie studentom bogatych, skłaniających do myślenia dyskusji podczas wykładów</a:t>
             </a:r>
           </a:p>
           <a:p>
@@ -4540,7 +4540,7 @@
               <a:rPr lang="en-US" dirty="0">
                 <a:latin typeface="+mn-lt"/>
               </a:rPr>
-              <a:t>To provide students with experiential learning opportunities during laboratory sessions</a:t>
+              <a:t>Zapewnienie studentom możliwości uczenia się przez doświadczenie podczas zajęć laboratoryjnych</a:t>
             </a:r>
           </a:p>
         </p:txBody>
@@ -4641,7 +4641,7 @@
               <a:rPr lang="en-US" sz="6000" dirty="0">
                 <a:latin typeface="+mj-lt"/>
               </a:rPr>
-              <a:t>Class Schedule</a:t>
+              <a:t>Harmonogram zajęć</a:t>
             </a:r>
           </a:p>
         </p:txBody>
@@ -4681,7 +4681,7 @@
       </p:sp>
       <p:graphicFrame>
         <p:nvGraphicFramePr>
-          <p:cNvPr id="9" name="Table 8" descr="Simple table with 3 columns and 7 rows.">
+          <p:cNvPr id="9" name="Table 8" descr="Prosta tabela z 3 kolumnami i 7 wierszami.">
             <a:extLst>
               <a:ext uri="{FF2B5EF4-FFF2-40B4-BE49-F238E27FC236}">
                 <a16:creationId xmlns:a16="http://schemas.microsoft.com/office/drawing/2014/main" id="{5D8A8DE4-196E-1F44-8828-2FD048152710}"/>
@@ -4750,7 +4750,7 @@
                         <a:rPr lang="en-US" sz="2400" dirty="0">
                           <a:effectLst/>
                         </a:rPr>
-                        <a:t>Week</a:t>
+                        <a:t>Tydzień</a:t>
                       </a:r>
                       <a:endParaRPr lang="en-US" sz="2400" dirty="0">
                         <a:effectLst/>
@@ -4779,7 +4779,7 @@
                         <a:rPr lang="en-US" sz="2400" dirty="0">
                           <a:effectLst/>
                         </a:rPr>
-                        <a:t>Topic</a:t>
+                        <a:t>Temat</a:t>
                       </a:r>
                       <a:endParaRPr lang="en-US" sz="2400" dirty="0">
                         <a:effectLst/>
@@ -4808,7 +4808,7 @@
                         <a:rPr lang="en-US" sz="2400" dirty="0">
                           <a:effectLst/>
                         </a:rPr>
-                        <a:t>Reading Assignment</a:t>
+                        <a:t>Zadana lektura</a:t>
                       </a:r>
                       <a:endParaRPr lang="en-US" sz="2400" dirty="0">
                         <a:effectLst/>
@@ -4873,7 +4873,7 @@
                         <a:rPr lang="en-US" sz="2400" dirty="0">
                           <a:effectLst/>
                         </a:rPr>
-                        <a:t>Course Introduction</a:t>
+                        <a:t>Wprowadzenie do kursu</a:t>
                       </a:r>
                       <a:endParaRPr lang="en-US" sz="2400" dirty="0">
                         <a:effectLst/>
@@ -4902,7 +4902,7 @@
                         <a:rPr lang="en-US" sz="2400" dirty="0">
                           <a:effectLst/>
                         </a:rPr>
-                        <a:t>Chapter 1</a:t>
+                        <a:t>Rozdział 1</a:t>
                       </a:r>
                       <a:endParaRPr lang="en-US" sz="2400" dirty="0">
                         <a:effectLst/>
@@ -4967,7 +4967,7 @@
                         <a:rPr lang="en-US" sz="2400" dirty="0">
                           <a:effectLst/>
                         </a:rPr>
-                        <a:t>Inertia, equilibrium, kinematics</a:t>
+                        <a:t>Bezwładność, równowaga, kinematyka</a:t>
                       </a:r>
                       <a:endParaRPr lang="en-US" sz="2400" dirty="0">
                         <a:effectLst/>
@@ -4996,7 +4996,7 @@
                         <a:rPr lang="en-US" sz="2400" dirty="0">
                           <a:effectLst/>
                         </a:rPr>
-                        <a:t>Chapters 2-3</a:t>
+                        <a:t>Rozdziały 2-3</a:t>
                       </a:r>
                       <a:endParaRPr lang="en-US" sz="2400" dirty="0">
                         <a:effectLst/>
@@ -5061,7 +5061,7 @@
                         <a:rPr lang="en-US" sz="2400" dirty="0">
                           <a:effectLst/>
                         </a:rPr>
-                        <a:t>Newton’s laws, vectors, momentum, energy</a:t>
+                        <a:t>Zasady dynamiki Newtona, wektory, pęd, energia</a:t>
                       </a:r>
                       <a:endParaRPr lang="en-US" sz="2400" dirty="0">
                         <a:effectLst/>
@@ -5090,7 +5090,7 @@
                         <a:rPr lang="en-US" sz="2400" dirty="0">
                           <a:effectLst/>
                         </a:rPr>
-                        <a:t>Chapters 4-7</a:t>
+                        <a:t>Rozdziały 4-7</a:t>
                       </a:r>
                       <a:endParaRPr lang="en-US" sz="2400" dirty="0">
                         <a:effectLst/>
@@ -5155,7 +5155,7 @@
                         <a:rPr lang="en-US" sz="2400">
                           <a:effectLst/>
                         </a:rPr>
-                        <a:t>Matter, elasticity, scaling</a:t>
+                        <a:t>Materia, sprężystość, skalowanie</a:t>
                       </a:r>
                       <a:endParaRPr lang="en-US" sz="2400">
                         <a:effectLst/>
@@ -5184,7 +5184,7 @@
                         <a:rPr lang="en-US" sz="2400" dirty="0">
                           <a:effectLst/>
                         </a:rPr>
-                        <a:t>Chapters 8-10</a:t>
+                        <a:t>Rozdziały 8-10</a:t>
                       </a:r>
                       <a:endParaRPr lang="en-US" sz="2400" dirty="0">
                         <a:effectLst/>
@@ -5249,7 +5249,7 @@
                         <a:rPr lang="en-US" sz="2400" dirty="0">
                           <a:effectLst/>
                         </a:rPr>
-                        <a:t>Wake kinematics, sound, electricity, magnetism, induction</a:t>
+                        <a:t>Kinematyka fal, dźwięk, elektryczność, magnetyzm, indukcja</a:t>
                       </a:r>
                       <a:endParaRPr lang="en-US" sz="2400" dirty="0">
                         <a:effectLst/>
@@ -5278,7 +5278,7 @@
                         <a:rPr lang="en-US" sz="2400" dirty="0">
                           <a:effectLst/>
                         </a:rPr>
-                        <a:t>Chapters 11-15</a:t>
+                        <a:t>Rozdziały 11-15</a:t>
                       </a:r>
                       <a:endParaRPr lang="en-US" sz="2400" dirty="0">
                         <a:effectLst/>
@@ -5343,7 +5343,7 @@
                         <a:rPr lang="en-US" sz="2400">
                           <a:effectLst/>
                         </a:rPr>
-                        <a:t>Light, reflection and refraction, emission</a:t>
+                        <a:t>Światło, odbicie i załamanie, emisja</a:t>
                       </a:r>
                       <a:endParaRPr lang="en-US" sz="2400">
                         <a:effectLst/>
@@ -5372,7 +5372,7 @@
                         <a:rPr lang="en-US" sz="2400" dirty="0">
                           <a:effectLst/>
                         </a:rPr>
-                        <a:t>Chapters 16-18</a:t>
+                        <a:t>Rozdziały 16-18</a:t>
                       </a:r>
                       <a:endParaRPr lang="en-US" sz="2400" dirty="0">
                         <a:effectLst/>
@@ -5437,7 +5437,7 @@
                         <a:rPr lang="en-US" sz="2400" dirty="0">
                           <a:effectLst/>
                         </a:rPr>
-                        <a:t>Review, final exam</a:t>
+                        <a:t>Powtórzenie, egzamin końcowy</a:t>
                       </a:r>
                       <a:endParaRPr lang="en-US" sz="2400" dirty="0">
                         <a:effectLst/>
@@ -5545,7 +5545,7 @@
               <a:rPr lang="en-US" sz="6000" dirty="0">
                 <a:latin typeface="+mj-lt"/>
               </a:rPr>
-              <a:t>Grades</a:t>
+              <a:t>Oceny</a:t>
             </a:r>
           </a:p>
         </p:txBody>
@@ -5580,7 +5580,7 @@
           <a:p>
             <a:r>
               <a:rPr lang="en-US" sz="2400" dirty="0"/>
-              <a:t>Grades will be assigned on a ten-point scale (90 to 100 is an A, 80 to 89 is a B, etc.). Homework, exams, and projects will be weighted as follows:</a:t>
+              <a:t>Oceny będą przyznawane w skali dziesięciopunktowej (90 do 100 to 5, 80 do 89 to 4 itd.). Prace domowe, egzaminy i projekty będą ważone następująco:</a:t>
             </a:r>
           </a:p>
         </p:txBody>
@@ -5788,7 +5788,7 @@
                 </a:solidFill>
                 <a:latin typeface="+mn-lt"/>
               </a:rPr>
-              <a:t>Homework</a:t>
+              <a:t>Prace domowe</a:t>
             </a:r>
           </a:p>
         </p:txBody>
@@ -6040,7 +6040,7 @@
                 </a:solidFill>
                 <a:latin typeface="+mn-lt"/>
               </a:rPr>
-              <a:t>Exams</a:t>
+              <a:t>Egzaminy</a:t>
             </a:r>
           </a:p>
         </p:txBody>
@@ -6102,7 +6102,7 @@
               <a:rPr lang="en-US" dirty="0">
                 <a:latin typeface="+mn-lt"/>
               </a:rPr>
-              <a:t>Final – 20%</a:t>
+              <a:t>Końcowy – 20%</a:t>
             </a:r>
           </a:p>
         </p:txBody>
@@ -6146,7 +6146,7 @@
                 </a:solidFill>
                 <a:latin typeface="+mn-lt"/>
               </a:rPr>
-              <a:t>Projects</a:t>
+              <a:t>Projekty</a:t>
             </a:r>
           </a:p>
         </p:txBody>
@@ -6206,7 +6206,7 @@
               <a:rPr lang="en-US" dirty="0">
                 <a:latin typeface="+mn-lt"/>
               </a:rPr>
-              <a:t>Final – 15%</a:t>
+              <a:t>Końcowy – 15%</a:t>
             </a:r>
           </a:p>
         </p:txBody>
